--- a/AgenticAI/5-Tools-and-Framework-RAG/crewAI/2_Workflow_sequential_vs_hierachical.pptx
+++ b/AgenticAI/5-Tools-and-Framework-RAG/crewAI/2_Workflow_sequential_vs_hierachical.pptx
@@ -5,10 +5,10 @@
     <p:sldMasterId id="2147483648" r:id="rId1"/>
   </p:sldMasterIdLst>
   <p:notesMasterIdLst>
-    <p:notesMasterId r:id="rId8"/>
+    <p:notesMasterId r:id="rId9"/>
   </p:notesMasterIdLst>
   <p:handoutMasterIdLst>
-    <p:handoutMasterId r:id="rId9"/>
+    <p:handoutMasterId r:id="rId10"/>
   </p:handoutMasterIdLst>
   <p:sldIdLst>
     <p:sldId id="257" r:id="rId2"/>
@@ -16,7 +16,8 @@
     <p:sldId id="279" r:id="rId4"/>
     <p:sldId id="275" r:id="rId5"/>
     <p:sldId id="277" r:id="rId6"/>
-    <p:sldId id="278" r:id="rId7"/>
+    <p:sldId id="280" r:id="rId7"/>
+    <p:sldId id="278" r:id="rId8"/>
   </p:sldIdLst>
   <p:sldSz cx="12192000" cy="6858000"/>
   <p:notesSz cx="6858000" cy="9144000"/>
@@ -5533,18 +5534,7 @@
                   </a:schemeClr>
                 </a:solidFill>
               </a:rPr>
-              <a:t>Suppose students submit a project proposal on Machine </a:t>
-            </a:r>
-            <a:r>
-              <a:rPr lang="en-IN" sz="2400">
-                <a:solidFill>
-                  <a:schemeClr val="accent6">
-                    <a:lumMod val="60000"/>
-                    <a:lumOff val="40000"/>
-                  </a:schemeClr>
-                </a:solidFill>
-              </a:rPr>
-              <a:t>Learning system</a:t>
+              <a:t>Suppose students submit a project proposal on Machine Learning system</a:t>
             </a:r>
             <a:endParaRPr lang="en-IN" sz="2400" b="1" dirty="0">
               <a:solidFill>
@@ -7846,6 +7836,1080 @@
 </file>
 
 <file path=ppt/slides/slide6.xml><?xml version="1.0" encoding="utf-8"?>
+<p:sld xmlns:a="http://schemas.openxmlformats.org/drawingml/2006/main" xmlns:r="http://schemas.openxmlformats.org/officeDocument/2006/relationships" xmlns:p="http://schemas.openxmlformats.org/presentationml/2006/main">
+  <p:cSld>
+    <p:spTree>
+      <p:nvGrpSpPr>
+        <p:cNvPr id="1" name="">
+          <a:extLst>
+            <a:ext uri="{FF2B5EF4-FFF2-40B4-BE49-F238E27FC236}">
+              <a16:creationId xmlns:a16="http://schemas.microsoft.com/office/drawing/2014/main" id="{6F3C4C61-1704-D6FC-FF44-989FFCB0BB88}"/>
+            </a:ext>
+          </a:extLst>
+        </p:cNvPr>
+        <p:cNvGrpSpPr/>
+        <p:nvPr/>
+      </p:nvGrpSpPr>
+      <p:grpSpPr>
+        <a:xfrm>
+          <a:off x="0" y="0"/>
+          <a:ext cx="0" cy="0"/>
+          <a:chOff x="0" y="0"/>
+          <a:chExt cx="0" cy="0"/>
+        </a:xfrm>
+      </p:grpSpPr>
+      <p:sp>
+        <p:nvSpPr>
+          <p:cNvPr id="3" name="TextBox 2">
+            <a:extLst>
+              <a:ext uri="{FF2B5EF4-FFF2-40B4-BE49-F238E27FC236}">
+                <a16:creationId xmlns:a16="http://schemas.microsoft.com/office/drawing/2014/main" id="{CB9B6E27-2A7D-8EAE-CEF2-889FC140C4AE}"/>
+              </a:ext>
+            </a:extLst>
+          </p:cNvPr>
+          <p:cNvSpPr txBox="1"/>
+          <p:nvPr/>
+        </p:nvSpPr>
+        <p:spPr>
+          <a:xfrm>
+            <a:off x="237744" y="242423"/>
+            <a:ext cx="8290107" cy="830997"/>
+          </a:xfrm>
+          <a:prstGeom prst="rect">
+            <a:avLst/>
+          </a:prstGeom>
+          <a:noFill/>
+        </p:spPr>
+        <p:txBody>
+          <a:bodyPr wrap="square">
+            <a:spAutoFit/>
+          </a:bodyPr>
+          <a:lstStyle/>
+          <a:p>
+            <a:pPr>
+              <a:buNone/>
+            </a:pPr>
+            <a:r>
+              <a:rPr lang="en-IN" sz="2400" b="1" dirty="0">
+                <a:solidFill>
+                  <a:schemeClr val="accent6">
+                    <a:lumMod val="60000"/>
+                    <a:lumOff val="40000"/>
+                  </a:schemeClr>
+                </a:solidFill>
+              </a:rPr>
+              <a:t>Example Hierarchical Process</a:t>
+            </a:r>
+          </a:p>
+          <a:p>
+            <a:pPr>
+              <a:buNone/>
+            </a:pPr>
+            <a:r>
+              <a:rPr lang="en-IN" sz="2400" dirty="0">
+                <a:solidFill>
+                  <a:schemeClr val="accent6">
+                    <a:lumMod val="60000"/>
+                    <a:lumOff val="40000"/>
+                  </a:schemeClr>
+                </a:solidFill>
+              </a:rPr>
+              <a:t>Consider an </a:t>
+            </a:r>
+            <a:r>
+              <a:rPr lang="en-IN" sz="2400" b="1" dirty="0">
+                <a:solidFill>
+                  <a:schemeClr val="accent6">
+                    <a:lumMod val="60000"/>
+                    <a:lumOff val="40000"/>
+                  </a:schemeClr>
+                </a:solidFill>
+              </a:rPr>
+              <a:t>AI University Event Planning System</a:t>
+            </a:r>
+            <a:r>
+              <a:rPr lang="en-IN" sz="2400" dirty="0">
+                <a:solidFill>
+                  <a:schemeClr val="accent6">
+                    <a:lumMod val="60000"/>
+                    <a:lumOff val="40000"/>
+                  </a:schemeClr>
+                </a:solidFill>
+              </a:rPr>
+              <a:t>.</a:t>
+            </a:r>
+            <a:endParaRPr lang="en-IN" sz="2400" b="1" dirty="0">
+              <a:solidFill>
+                <a:schemeClr val="accent6">
+                  <a:lumMod val="60000"/>
+                  <a:lumOff val="40000"/>
+                </a:schemeClr>
+              </a:solidFill>
+            </a:endParaRPr>
+          </a:p>
+        </p:txBody>
+      </p:sp>
+      <p:sp>
+        <p:nvSpPr>
+          <p:cNvPr id="5" name="Rectangle: Rounded Corners 4">
+            <a:extLst>
+              <a:ext uri="{FF2B5EF4-FFF2-40B4-BE49-F238E27FC236}">
+                <a16:creationId xmlns:a16="http://schemas.microsoft.com/office/drawing/2014/main" id="{77B53D24-F26E-5898-502E-CF7A441EBABA}"/>
+              </a:ext>
+            </a:extLst>
+          </p:cNvPr>
+          <p:cNvSpPr/>
+          <p:nvPr/>
+        </p:nvSpPr>
+        <p:spPr>
+          <a:xfrm>
+            <a:off x="237744" y="3335084"/>
+            <a:ext cx="1857876" cy="532510"/>
+          </a:xfrm>
+          <a:prstGeom prst="roundRect">
+            <a:avLst/>
+          </a:prstGeom>
+        </p:spPr>
+        <p:style>
+          <a:lnRef idx="2">
+            <a:schemeClr val="accent1">
+              <a:shade val="15000"/>
+            </a:schemeClr>
+          </a:lnRef>
+          <a:fillRef idx="1">
+            <a:schemeClr val="accent1"/>
+          </a:fillRef>
+          <a:effectRef idx="0">
+            <a:schemeClr val="accent1"/>
+          </a:effectRef>
+          <a:fontRef idx="minor">
+            <a:schemeClr val="lt1"/>
+          </a:fontRef>
+        </p:style>
+        <p:txBody>
+          <a:bodyPr rtlCol="0" anchor="ctr"/>
+          <a:lstStyle/>
+          <a:p>
+            <a:pPr algn="ctr"/>
+            <a:r>
+              <a:rPr lang="en-US" dirty="0"/>
+              <a:t>Venue Agent:</a:t>
+            </a:r>
+          </a:p>
+          <a:p>
+            <a:pPr algn="ctr"/>
+            <a:r>
+              <a:rPr lang="en-US" dirty="0"/>
+              <a:t>Finds Venue</a:t>
+            </a:r>
+            <a:endParaRPr lang="en-IN" dirty="0"/>
+          </a:p>
+        </p:txBody>
+      </p:sp>
+      <p:sp>
+        <p:nvSpPr>
+          <p:cNvPr id="7" name="Rectangle: Rounded Corners 6">
+            <a:extLst>
+              <a:ext uri="{FF2B5EF4-FFF2-40B4-BE49-F238E27FC236}">
+                <a16:creationId xmlns:a16="http://schemas.microsoft.com/office/drawing/2014/main" id="{BC71A356-AFA7-AE2B-9BB5-280BA8C326E7}"/>
+              </a:ext>
+            </a:extLst>
+          </p:cNvPr>
+          <p:cNvSpPr/>
+          <p:nvPr/>
+        </p:nvSpPr>
+        <p:spPr>
+          <a:xfrm>
+            <a:off x="5029455" y="3335084"/>
+            <a:ext cx="3498396" cy="549526"/>
+          </a:xfrm>
+          <a:prstGeom prst="roundRect">
+            <a:avLst/>
+          </a:prstGeom>
+        </p:spPr>
+        <p:style>
+          <a:lnRef idx="2">
+            <a:schemeClr val="accent1">
+              <a:shade val="15000"/>
+            </a:schemeClr>
+          </a:lnRef>
+          <a:fillRef idx="1">
+            <a:schemeClr val="accent1"/>
+          </a:fillRef>
+          <a:effectRef idx="0">
+            <a:schemeClr val="accent1"/>
+          </a:effectRef>
+          <a:fontRef idx="minor">
+            <a:schemeClr val="lt1"/>
+          </a:fontRef>
+        </p:style>
+        <p:txBody>
+          <a:bodyPr rtlCol="0" anchor="ctr"/>
+          <a:lstStyle/>
+          <a:p>
+            <a:pPr algn="ctr"/>
+            <a:r>
+              <a:rPr lang="en-US" dirty="0"/>
+              <a:t>Marketing Agent:</a:t>
+            </a:r>
+          </a:p>
+          <a:p>
+            <a:pPr algn="ctr"/>
+            <a:r>
+              <a:rPr lang="en-US" dirty="0"/>
+              <a:t>Promotes on Social media</a:t>
+            </a:r>
+            <a:endParaRPr lang="en-IN" dirty="0"/>
+          </a:p>
+        </p:txBody>
+      </p:sp>
+      <p:sp>
+        <p:nvSpPr>
+          <p:cNvPr id="9" name="Rectangle: Rounded Corners 8">
+            <a:extLst>
+              <a:ext uri="{FF2B5EF4-FFF2-40B4-BE49-F238E27FC236}">
+                <a16:creationId xmlns:a16="http://schemas.microsoft.com/office/drawing/2014/main" id="{82B53CC7-BDBE-B3EB-DB1F-1776788B1BF9}"/>
+              </a:ext>
+            </a:extLst>
+          </p:cNvPr>
+          <p:cNvSpPr/>
+          <p:nvPr/>
+        </p:nvSpPr>
+        <p:spPr>
+          <a:xfrm>
+            <a:off x="2341514" y="3335084"/>
+            <a:ext cx="2541381" cy="549526"/>
+          </a:xfrm>
+          <a:prstGeom prst="roundRect">
+            <a:avLst/>
+          </a:prstGeom>
+        </p:spPr>
+        <p:style>
+          <a:lnRef idx="2">
+            <a:schemeClr val="accent1">
+              <a:shade val="15000"/>
+            </a:schemeClr>
+          </a:lnRef>
+          <a:fillRef idx="1">
+            <a:schemeClr val="accent1"/>
+          </a:fillRef>
+          <a:effectRef idx="0">
+            <a:schemeClr val="accent1"/>
+          </a:effectRef>
+          <a:fontRef idx="minor">
+            <a:schemeClr val="lt1"/>
+          </a:fontRef>
+        </p:style>
+        <p:txBody>
+          <a:bodyPr rtlCol="0" anchor="ctr"/>
+          <a:lstStyle/>
+          <a:p>
+            <a:pPr algn="ctr"/>
+            <a:r>
+              <a:rPr lang="en-US" dirty="0"/>
+              <a:t>Speaker Agent:</a:t>
+            </a:r>
+          </a:p>
+          <a:p>
+            <a:pPr algn="ctr"/>
+            <a:r>
+              <a:rPr lang="en-US" dirty="0"/>
+              <a:t>Finds Speakers + Topics</a:t>
+            </a:r>
+            <a:endParaRPr lang="en-IN" dirty="0"/>
+          </a:p>
+        </p:txBody>
+      </p:sp>
+      <p:sp>
+        <p:nvSpPr>
+          <p:cNvPr id="13" name="Oval 12">
+            <a:extLst>
+              <a:ext uri="{FF2B5EF4-FFF2-40B4-BE49-F238E27FC236}">
+                <a16:creationId xmlns:a16="http://schemas.microsoft.com/office/drawing/2014/main" id="{A258AB10-5F42-9D64-C859-B5A4BA475504}"/>
+              </a:ext>
+            </a:extLst>
+          </p:cNvPr>
+          <p:cNvSpPr/>
+          <p:nvPr/>
+        </p:nvSpPr>
+        <p:spPr>
+          <a:xfrm>
+            <a:off x="2760084" y="6136638"/>
+            <a:ext cx="1283562" cy="585216"/>
+          </a:xfrm>
+          <a:prstGeom prst="ellipse">
+            <a:avLst/>
+          </a:prstGeom>
+          <a:solidFill>
+            <a:srgbClr val="7030A0"/>
+          </a:solidFill>
+        </p:spPr>
+        <p:style>
+          <a:lnRef idx="2">
+            <a:schemeClr val="accent1">
+              <a:shade val="15000"/>
+            </a:schemeClr>
+          </a:lnRef>
+          <a:fillRef idx="1">
+            <a:schemeClr val="accent1"/>
+          </a:fillRef>
+          <a:effectRef idx="0">
+            <a:schemeClr val="accent1"/>
+          </a:effectRef>
+          <a:fontRef idx="minor">
+            <a:schemeClr val="lt1"/>
+          </a:fontRef>
+        </p:style>
+        <p:txBody>
+          <a:bodyPr rtlCol="0" anchor="ctr"/>
+          <a:lstStyle/>
+          <a:p>
+            <a:pPr algn="ctr"/>
+            <a:r>
+              <a:rPr lang="en-US" dirty="0"/>
+              <a:t>Final result</a:t>
+            </a:r>
+            <a:endParaRPr lang="en-IN" dirty="0"/>
+          </a:p>
+        </p:txBody>
+      </p:sp>
+      <p:sp>
+        <p:nvSpPr>
+          <p:cNvPr id="15" name="Oval 14">
+            <a:extLst>
+              <a:ext uri="{FF2B5EF4-FFF2-40B4-BE49-F238E27FC236}">
+                <a16:creationId xmlns:a16="http://schemas.microsoft.com/office/drawing/2014/main" id="{5E7D4E2F-4500-67F5-01CD-6C14C5D9CF83}"/>
+              </a:ext>
+            </a:extLst>
+          </p:cNvPr>
+          <p:cNvSpPr/>
+          <p:nvPr/>
+        </p:nvSpPr>
+        <p:spPr>
+          <a:xfrm>
+            <a:off x="3076956" y="1073420"/>
+            <a:ext cx="1554480" cy="585216"/>
+          </a:xfrm>
+          <a:prstGeom prst="ellipse">
+            <a:avLst/>
+          </a:prstGeom>
+          <a:solidFill>
+            <a:srgbClr val="7030A0"/>
+          </a:solidFill>
+        </p:spPr>
+        <p:style>
+          <a:lnRef idx="2">
+            <a:schemeClr val="accent1">
+              <a:shade val="15000"/>
+            </a:schemeClr>
+          </a:lnRef>
+          <a:fillRef idx="1">
+            <a:schemeClr val="accent1"/>
+          </a:fillRef>
+          <a:effectRef idx="0">
+            <a:schemeClr val="accent1"/>
+          </a:effectRef>
+          <a:fontRef idx="minor">
+            <a:schemeClr val="lt1"/>
+          </a:fontRef>
+        </p:style>
+        <p:txBody>
+          <a:bodyPr rtlCol="0" anchor="ctr"/>
+          <a:lstStyle/>
+          <a:p>
+            <a:pPr algn="ctr"/>
+            <a:r>
+              <a:rPr lang="en-US" dirty="0"/>
+              <a:t>Task</a:t>
+            </a:r>
+            <a:endParaRPr lang="en-IN" dirty="0"/>
+          </a:p>
+        </p:txBody>
+      </p:sp>
+      <p:sp>
+        <p:nvSpPr>
+          <p:cNvPr id="35" name="Rectangle: Rounded Corners 34">
+            <a:extLst>
+              <a:ext uri="{FF2B5EF4-FFF2-40B4-BE49-F238E27FC236}">
+                <a16:creationId xmlns:a16="http://schemas.microsoft.com/office/drawing/2014/main" id="{10B20CF6-6DCB-1132-4A9D-9B7F53E15D6B}"/>
+              </a:ext>
+            </a:extLst>
+          </p:cNvPr>
+          <p:cNvSpPr/>
+          <p:nvPr/>
+        </p:nvSpPr>
+        <p:spPr>
+          <a:xfrm>
+            <a:off x="2923310" y="2181576"/>
+            <a:ext cx="1861772" cy="366867"/>
+          </a:xfrm>
+          <a:prstGeom prst="roundRect">
+            <a:avLst/>
+          </a:prstGeom>
+        </p:spPr>
+        <p:style>
+          <a:lnRef idx="2">
+            <a:schemeClr val="accent1">
+              <a:shade val="15000"/>
+            </a:schemeClr>
+          </a:lnRef>
+          <a:fillRef idx="1">
+            <a:schemeClr val="accent1"/>
+          </a:fillRef>
+          <a:effectRef idx="0">
+            <a:schemeClr val="accent1"/>
+          </a:effectRef>
+          <a:fontRef idx="minor">
+            <a:schemeClr val="lt1"/>
+          </a:fontRef>
+        </p:style>
+        <p:txBody>
+          <a:bodyPr rtlCol="0" anchor="ctr"/>
+          <a:lstStyle/>
+          <a:p>
+            <a:pPr algn="ctr"/>
+            <a:r>
+              <a:rPr lang="en-US" dirty="0"/>
+              <a:t>Manager Agent</a:t>
+            </a:r>
+            <a:endParaRPr lang="en-IN" dirty="0"/>
+          </a:p>
+        </p:txBody>
+      </p:sp>
+      <p:sp>
+        <p:nvSpPr>
+          <p:cNvPr id="37" name="Arrow: Down 36">
+            <a:extLst>
+              <a:ext uri="{FF2B5EF4-FFF2-40B4-BE49-F238E27FC236}">
+                <a16:creationId xmlns:a16="http://schemas.microsoft.com/office/drawing/2014/main" id="{0907BF42-46DE-1444-C838-A1F5DF0EF9AB}"/>
+              </a:ext>
+            </a:extLst>
+          </p:cNvPr>
+          <p:cNvSpPr/>
+          <p:nvPr/>
+        </p:nvSpPr>
+        <p:spPr>
+          <a:xfrm>
+            <a:off x="3739896" y="1772716"/>
+            <a:ext cx="228600" cy="294779"/>
+          </a:xfrm>
+          <a:prstGeom prst="downArrow">
+            <a:avLst/>
+          </a:prstGeom>
+        </p:spPr>
+        <p:style>
+          <a:lnRef idx="2">
+            <a:schemeClr val="accent1">
+              <a:shade val="15000"/>
+            </a:schemeClr>
+          </a:lnRef>
+          <a:fillRef idx="1">
+            <a:schemeClr val="accent1"/>
+          </a:fillRef>
+          <a:effectRef idx="0">
+            <a:schemeClr val="accent1"/>
+          </a:effectRef>
+          <a:fontRef idx="minor">
+            <a:schemeClr val="lt1"/>
+          </a:fontRef>
+        </p:style>
+        <p:txBody>
+          <a:bodyPr rtlCol="0" anchor="ctr"/>
+          <a:lstStyle/>
+          <a:p>
+            <a:pPr algn="ctr"/>
+            <a:endParaRPr lang="en-IN"/>
+          </a:p>
+        </p:txBody>
+      </p:sp>
+      <p:sp>
+        <p:nvSpPr>
+          <p:cNvPr id="4" name="TextBox 3">
+            <a:extLst>
+              <a:ext uri="{FF2B5EF4-FFF2-40B4-BE49-F238E27FC236}">
+                <a16:creationId xmlns:a16="http://schemas.microsoft.com/office/drawing/2014/main" id="{73EB9086-DA64-E865-794D-26C71D011437}"/>
+              </a:ext>
+            </a:extLst>
+          </p:cNvPr>
+          <p:cNvSpPr txBox="1"/>
+          <p:nvPr/>
+        </p:nvSpPr>
+        <p:spPr>
+          <a:xfrm>
+            <a:off x="5432607" y="1212378"/>
+            <a:ext cx="6190488" cy="369332"/>
+          </a:xfrm>
+          <a:prstGeom prst="rect">
+            <a:avLst/>
+          </a:prstGeom>
+          <a:noFill/>
+        </p:spPr>
+        <p:txBody>
+          <a:bodyPr wrap="square">
+            <a:spAutoFit/>
+          </a:bodyPr>
+          <a:lstStyle/>
+          <a:p>
+            <a:r>
+              <a:rPr lang="en-IN" dirty="0">
+                <a:solidFill>
+                  <a:schemeClr val="accent6">
+                    <a:lumMod val="60000"/>
+                    <a:lumOff val="40000"/>
+                  </a:schemeClr>
+                </a:solidFill>
+              </a:rPr>
+              <a:t>Organize a 2-day AI conference for 500 students.</a:t>
+            </a:r>
+          </a:p>
+        </p:txBody>
+      </p:sp>
+      <p:sp>
+        <p:nvSpPr>
+          <p:cNvPr id="8" name="Arrow: Down 7">
+            <a:extLst>
+              <a:ext uri="{FF2B5EF4-FFF2-40B4-BE49-F238E27FC236}">
+                <a16:creationId xmlns:a16="http://schemas.microsoft.com/office/drawing/2014/main" id="{07B255E1-BDDD-821A-6728-3FC5E777845A}"/>
+              </a:ext>
+            </a:extLst>
+          </p:cNvPr>
+          <p:cNvSpPr/>
+          <p:nvPr/>
+        </p:nvSpPr>
+        <p:spPr>
+          <a:xfrm>
+            <a:off x="3625596" y="2649850"/>
+            <a:ext cx="228600" cy="525801"/>
+          </a:xfrm>
+          <a:prstGeom prst="downArrow">
+            <a:avLst/>
+          </a:prstGeom>
+        </p:spPr>
+        <p:style>
+          <a:lnRef idx="2">
+            <a:schemeClr val="accent1">
+              <a:shade val="15000"/>
+            </a:schemeClr>
+          </a:lnRef>
+          <a:fillRef idx="1">
+            <a:schemeClr val="accent1"/>
+          </a:fillRef>
+          <a:effectRef idx="0">
+            <a:schemeClr val="accent1"/>
+          </a:effectRef>
+          <a:fontRef idx="minor">
+            <a:schemeClr val="lt1"/>
+          </a:fontRef>
+        </p:style>
+        <p:txBody>
+          <a:bodyPr rtlCol="0" anchor="ctr"/>
+          <a:lstStyle/>
+          <a:p>
+            <a:pPr algn="ctr"/>
+            <a:endParaRPr lang="en-IN"/>
+          </a:p>
+        </p:txBody>
+      </p:sp>
+      <p:sp>
+        <p:nvSpPr>
+          <p:cNvPr id="11" name="Rectangle: Rounded Corners 10">
+            <a:extLst>
+              <a:ext uri="{FF2B5EF4-FFF2-40B4-BE49-F238E27FC236}">
+                <a16:creationId xmlns:a16="http://schemas.microsoft.com/office/drawing/2014/main" id="{91E3F97E-EBB6-4EDD-05A2-8D0BD163034F}"/>
+              </a:ext>
+            </a:extLst>
+          </p:cNvPr>
+          <p:cNvSpPr/>
+          <p:nvPr/>
+        </p:nvSpPr>
+        <p:spPr>
+          <a:xfrm>
+            <a:off x="902208" y="5224844"/>
+            <a:ext cx="1857876" cy="532510"/>
+          </a:xfrm>
+          <a:prstGeom prst="roundRect">
+            <a:avLst/>
+          </a:prstGeom>
+        </p:spPr>
+        <p:style>
+          <a:lnRef idx="2">
+            <a:schemeClr val="accent1">
+              <a:shade val="15000"/>
+            </a:schemeClr>
+          </a:lnRef>
+          <a:fillRef idx="1">
+            <a:schemeClr val="accent1"/>
+          </a:fillRef>
+          <a:effectRef idx="0">
+            <a:schemeClr val="accent1"/>
+          </a:effectRef>
+          <a:fontRef idx="minor">
+            <a:schemeClr val="lt1"/>
+          </a:fontRef>
+        </p:style>
+        <p:txBody>
+          <a:bodyPr rtlCol="0" anchor="ctr"/>
+          <a:lstStyle/>
+          <a:p>
+            <a:pPr algn="ctr"/>
+            <a:r>
+              <a:rPr lang="en-US" dirty="0"/>
+              <a:t>Budget Agent:</a:t>
+            </a:r>
+          </a:p>
+          <a:p>
+            <a:pPr algn="ctr"/>
+            <a:r>
+              <a:rPr lang="en-US" dirty="0"/>
+              <a:t>Checks budget</a:t>
+            </a:r>
+            <a:endParaRPr lang="en-IN" dirty="0"/>
+          </a:p>
+        </p:txBody>
+      </p:sp>
+      <p:sp>
+        <p:nvSpPr>
+          <p:cNvPr id="14" name="Rectangle: Rounded Corners 13">
+            <a:extLst>
+              <a:ext uri="{FF2B5EF4-FFF2-40B4-BE49-F238E27FC236}">
+                <a16:creationId xmlns:a16="http://schemas.microsoft.com/office/drawing/2014/main" id="{D69D53BB-69D5-9398-8F63-5F5599152044}"/>
+              </a:ext>
+            </a:extLst>
+          </p:cNvPr>
+          <p:cNvSpPr/>
+          <p:nvPr/>
+        </p:nvSpPr>
+        <p:spPr>
+          <a:xfrm>
+            <a:off x="2560371" y="4412521"/>
+            <a:ext cx="1861772" cy="366867"/>
+          </a:xfrm>
+          <a:prstGeom prst="roundRect">
+            <a:avLst/>
+          </a:prstGeom>
+        </p:spPr>
+        <p:style>
+          <a:lnRef idx="2">
+            <a:schemeClr val="accent1">
+              <a:shade val="15000"/>
+            </a:schemeClr>
+          </a:lnRef>
+          <a:fillRef idx="1">
+            <a:schemeClr val="accent1"/>
+          </a:fillRef>
+          <a:effectRef idx="0">
+            <a:schemeClr val="accent1"/>
+          </a:effectRef>
+          <a:fontRef idx="minor">
+            <a:schemeClr val="lt1"/>
+          </a:fontRef>
+        </p:style>
+        <p:txBody>
+          <a:bodyPr rtlCol="0" anchor="ctr"/>
+          <a:lstStyle/>
+          <a:p>
+            <a:pPr algn="ctr"/>
+            <a:r>
+              <a:rPr lang="en-US" dirty="0"/>
+              <a:t>Manager Agent</a:t>
+            </a:r>
+            <a:endParaRPr lang="en-IN" dirty="0"/>
+          </a:p>
+        </p:txBody>
+      </p:sp>
+      <p:sp>
+        <p:nvSpPr>
+          <p:cNvPr id="17" name="Rectangle: Rounded Corners 16">
+            <a:extLst>
+              <a:ext uri="{FF2B5EF4-FFF2-40B4-BE49-F238E27FC236}">
+                <a16:creationId xmlns:a16="http://schemas.microsoft.com/office/drawing/2014/main" id="{ABE6E51A-C0E2-20A8-5452-0B1378B1D859}"/>
+              </a:ext>
+            </a:extLst>
+          </p:cNvPr>
+          <p:cNvSpPr/>
+          <p:nvPr/>
+        </p:nvSpPr>
+        <p:spPr>
+          <a:xfrm>
+            <a:off x="3947160" y="5252070"/>
+            <a:ext cx="1857876" cy="532510"/>
+          </a:xfrm>
+          <a:prstGeom prst="roundRect">
+            <a:avLst/>
+          </a:prstGeom>
+        </p:spPr>
+        <p:style>
+          <a:lnRef idx="2">
+            <a:schemeClr val="accent1">
+              <a:shade val="15000"/>
+            </a:schemeClr>
+          </a:lnRef>
+          <a:fillRef idx="1">
+            <a:schemeClr val="accent1"/>
+          </a:fillRef>
+          <a:effectRef idx="0">
+            <a:schemeClr val="accent1"/>
+          </a:effectRef>
+          <a:fontRef idx="minor">
+            <a:schemeClr val="lt1"/>
+          </a:fontRef>
+        </p:style>
+        <p:txBody>
+          <a:bodyPr rtlCol="0" anchor="ctr"/>
+          <a:lstStyle/>
+          <a:p>
+            <a:pPr algn="ctr"/>
+            <a:r>
+              <a:rPr lang="en-US" dirty="0"/>
+              <a:t>Schedule Agent:</a:t>
+            </a:r>
+          </a:p>
+          <a:p>
+            <a:pPr algn="ctr"/>
+            <a:r>
+              <a:rPr lang="en-US" dirty="0"/>
+              <a:t>Finds time slots</a:t>
+            </a:r>
+            <a:endParaRPr lang="en-IN" dirty="0"/>
+          </a:p>
+        </p:txBody>
+      </p:sp>
+      <p:sp>
+        <p:nvSpPr>
+          <p:cNvPr id="19" name="Arrow: Down 18">
+            <a:extLst>
+              <a:ext uri="{FF2B5EF4-FFF2-40B4-BE49-F238E27FC236}">
+                <a16:creationId xmlns:a16="http://schemas.microsoft.com/office/drawing/2014/main" id="{B49FAC76-FD1D-6C83-F913-B6C6C228DC2A}"/>
+              </a:ext>
+            </a:extLst>
+          </p:cNvPr>
+          <p:cNvSpPr/>
+          <p:nvPr/>
+        </p:nvSpPr>
+        <p:spPr>
+          <a:xfrm rot="3268404">
+            <a:off x="1979945" y="2423046"/>
+            <a:ext cx="228600" cy="982270"/>
+          </a:xfrm>
+          <a:prstGeom prst="downArrow">
+            <a:avLst/>
+          </a:prstGeom>
+        </p:spPr>
+        <p:style>
+          <a:lnRef idx="2">
+            <a:schemeClr val="accent1">
+              <a:shade val="15000"/>
+            </a:schemeClr>
+          </a:lnRef>
+          <a:fillRef idx="1">
+            <a:schemeClr val="accent1"/>
+          </a:fillRef>
+          <a:effectRef idx="0">
+            <a:schemeClr val="accent1"/>
+          </a:effectRef>
+          <a:fontRef idx="minor">
+            <a:schemeClr val="lt1"/>
+          </a:fontRef>
+        </p:style>
+        <p:txBody>
+          <a:bodyPr rtlCol="0" anchor="ctr"/>
+          <a:lstStyle/>
+          <a:p>
+            <a:pPr algn="ctr"/>
+            <a:endParaRPr lang="en-IN"/>
+          </a:p>
+        </p:txBody>
+      </p:sp>
+      <p:sp>
+        <p:nvSpPr>
+          <p:cNvPr id="21" name="Arrow: Down 20">
+            <a:extLst>
+              <a:ext uri="{FF2B5EF4-FFF2-40B4-BE49-F238E27FC236}">
+                <a16:creationId xmlns:a16="http://schemas.microsoft.com/office/drawing/2014/main" id="{28D0B807-37E9-1D24-3EFF-40B138DF5D87}"/>
+              </a:ext>
+            </a:extLst>
+          </p:cNvPr>
+          <p:cNvSpPr/>
+          <p:nvPr/>
+        </p:nvSpPr>
+        <p:spPr>
+          <a:xfrm rot="18362961">
+            <a:off x="5204982" y="2325858"/>
+            <a:ext cx="228600" cy="1035211"/>
+          </a:xfrm>
+          <a:prstGeom prst="downArrow">
+            <a:avLst/>
+          </a:prstGeom>
+        </p:spPr>
+        <p:style>
+          <a:lnRef idx="2">
+            <a:schemeClr val="accent1">
+              <a:shade val="15000"/>
+            </a:schemeClr>
+          </a:lnRef>
+          <a:fillRef idx="1">
+            <a:schemeClr val="accent1"/>
+          </a:fillRef>
+          <a:effectRef idx="0">
+            <a:schemeClr val="accent1"/>
+          </a:effectRef>
+          <a:fontRef idx="minor">
+            <a:schemeClr val="lt1"/>
+          </a:fontRef>
+        </p:style>
+        <p:txBody>
+          <a:bodyPr rtlCol="0" anchor="ctr"/>
+          <a:lstStyle/>
+          <a:p>
+            <a:pPr algn="ctr"/>
+            <a:endParaRPr lang="en-IN"/>
+          </a:p>
+        </p:txBody>
+      </p:sp>
+      <p:sp>
+        <p:nvSpPr>
+          <p:cNvPr id="23" name="Arrow: Down 22">
+            <a:extLst>
+              <a:ext uri="{FF2B5EF4-FFF2-40B4-BE49-F238E27FC236}">
+                <a16:creationId xmlns:a16="http://schemas.microsoft.com/office/drawing/2014/main" id="{22ABEC5D-CC6B-E39D-3C7E-33764E8F9D53}"/>
+              </a:ext>
+            </a:extLst>
+          </p:cNvPr>
+          <p:cNvSpPr/>
+          <p:nvPr/>
+        </p:nvSpPr>
+        <p:spPr>
+          <a:xfrm>
+            <a:off x="3516165" y="4016310"/>
+            <a:ext cx="228600" cy="294779"/>
+          </a:xfrm>
+          <a:prstGeom prst="downArrow">
+            <a:avLst/>
+          </a:prstGeom>
+        </p:spPr>
+        <p:style>
+          <a:lnRef idx="2">
+            <a:schemeClr val="accent1">
+              <a:shade val="15000"/>
+            </a:schemeClr>
+          </a:lnRef>
+          <a:fillRef idx="1">
+            <a:schemeClr val="accent1"/>
+          </a:fillRef>
+          <a:effectRef idx="0">
+            <a:schemeClr val="accent1"/>
+          </a:effectRef>
+          <a:fontRef idx="minor">
+            <a:schemeClr val="lt1"/>
+          </a:fontRef>
+        </p:style>
+        <p:txBody>
+          <a:bodyPr rtlCol="0" anchor="ctr"/>
+          <a:lstStyle/>
+          <a:p>
+            <a:pPr algn="ctr"/>
+            <a:endParaRPr lang="en-IN"/>
+          </a:p>
+        </p:txBody>
+      </p:sp>
+      <p:sp>
+        <p:nvSpPr>
+          <p:cNvPr id="25" name="Arrow: Down 24">
+            <a:extLst>
+              <a:ext uri="{FF2B5EF4-FFF2-40B4-BE49-F238E27FC236}">
+                <a16:creationId xmlns:a16="http://schemas.microsoft.com/office/drawing/2014/main" id="{A0B3F651-1ED6-650D-A2B3-DC8FA6A7EDE8}"/>
+              </a:ext>
+            </a:extLst>
+          </p:cNvPr>
+          <p:cNvSpPr/>
+          <p:nvPr/>
+        </p:nvSpPr>
+        <p:spPr>
+          <a:xfrm rot="2923151">
+            <a:off x="2323281" y="4742112"/>
+            <a:ext cx="228600" cy="478190"/>
+          </a:xfrm>
+          <a:prstGeom prst="downArrow">
+            <a:avLst/>
+          </a:prstGeom>
+        </p:spPr>
+        <p:style>
+          <a:lnRef idx="2">
+            <a:schemeClr val="accent1">
+              <a:shade val="15000"/>
+            </a:schemeClr>
+          </a:lnRef>
+          <a:fillRef idx="1">
+            <a:schemeClr val="accent1"/>
+          </a:fillRef>
+          <a:effectRef idx="0">
+            <a:schemeClr val="accent1"/>
+          </a:effectRef>
+          <a:fontRef idx="minor">
+            <a:schemeClr val="lt1"/>
+          </a:fontRef>
+        </p:style>
+        <p:txBody>
+          <a:bodyPr rtlCol="0" anchor="ctr"/>
+          <a:lstStyle/>
+          <a:p>
+            <a:pPr algn="ctr"/>
+            <a:endParaRPr lang="en-IN"/>
+          </a:p>
+        </p:txBody>
+      </p:sp>
+      <p:sp>
+        <p:nvSpPr>
+          <p:cNvPr id="27" name="Arrow: Down 26">
+            <a:extLst>
+              <a:ext uri="{FF2B5EF4-FFF2-40B4-BE49-F238E27FC236}">
+                <a16:creationId xmlns:a16="http://schemas.microsoft.com/office/drawing/2014/main" id="{E0315E43-ABA3-D9A0-37B8-5F8359DA4435}"/>
+              </a:ext>
+            </a:extLst>
+          </p:cNvPr>
+          <p:cNvSpPr/>
+          <p:nvPr/>
+        </p:nvSpPr>
+        <p:spPr>
+          <a:xfrm rot="18858420">
+            <a:off x="4469247" y="4795797"/>
+            <a:ext cx="228600" cy="468608"/>
+          </a:xfrm>
+          <a:prstGeom prst="downArrow">
+            <a:avLst/>
+          </a:prstGeom>
+        </p:spPr>
+        <p:style>
+          <a:lnRef idx="2">
+            <a:schemeClr val="accent1">
+              <a:shade val="15000"/>
+            </a:schemeClr>
+          </a:lnRef>
+          <a:fillRef idx="1">
+            <a:schemeClr val="accent1"/>
+          </a:fillRef>
+          <a:effectRef idx="0">
+            <a:schemeClr val="accent1"/>
+          </a:effectRef>
+          <a:fontRef idx="minor">
+            <a:schemeClr val="lt1"/>
+          </a:fontRef>
+        </p:style>
+        <p:txBody>
+          <a:bodyPr rtlCol="0" anchor="ctr"/>
+          <a:lstStyle/>
+          <a:p>
+            <a:pPr algn="ctr"/>
+            <a:endParaRPr lang="en-IN" dirty="0"/>
+          </a:p>
+        </p:txBody>
+      </p:sp>
+      <p:sp>
+        <p:nvSpPr>
+          <p:cNvPr id="29" name="Arrow: Down 28">
+            <a:extLst>
+              <a:ext uri="{FF2B5EF4-FFF2-40B4-BE49-F238E27FC236}">
+                <a16:creationId xmlns:a16="http://schemas.microsoft.com/office/drawing/2014/main" id="{F966C397-C3AF-1ACA-4C0E-58F2B0D65A07}"/>
+              </a:ext>
+            </a:extLst>
+          </p:cNvPr>
+          <p:cNvSpPr/>
+          <p:nvPr/>
+        </p:nvSpPr>
+        <p:spPr>
+          <a:xfrm rot="18858420">
+            <a:off x="2526341" y="5854938"/>
+            <a:ext cx="228600" cy="392578"/>
+          </a:xfrm>
+          <a:prstGeom prst="downArrow">
+            <a:avLst/>
+          </a:prstGeom>
+        </p:spPr>
+        <p:style>
+          <a:lnRef idx="2">
+            <a:schemeClr val="accent1">
+              <a:shade val="15000"/>
+            </a:schemeClr>
+          </a:lnRef>
+          <a:fillRef idx="1">
+            <a:schemeClr val="accent1"/>
+          </a:fillRef>
+          <a:effectRef idx="0">
+            <a:schemeClr val="accent1"/>
+          </a:effectRef>
+          <a:fontRef idx="minor">
+            <a:schemeClr val="lt1"/>
+          </a:fontRef>
+        </p:style>
+        <p:txBody>
+          <a:bodyPr rtlCol="0" anchor="ctr"/>
+          <a:lstStyle/>
+          <a:p>
+            <a:pPr algn="ctr"/>
+            <a:endParaRPr lang="en-IN"/>
+          </a:p>
+        </p:txBody>
+      </p:sp>
+      <p:sp>
+        <p:nvSpPr>
+          <p:cNvPr id="31" name="Arrow: Down 30">
+            <a:extLst>
+              <a:ext uri="{FF2B5EF4-FFF2-40B4-BE49-F238E27FC236}">
+                <a16:creationId xmlns:a16="http://schemas.microsoft.com/office/drawing/2014/main" id="{BBB810D1-EBAA-BD12-D6F5-B0A90255F4E9}"/>
+              </a:ext>
+            </a:extLst>
+          </p:cNvPr>
+          <p:cNvSpPr/>
+          <p:nvPr/>
+        </p:nvSpPr>
+        <p:spPr>
+          <a:xfrm rot="2923151">
+            <a:off x="4042077" y="5757061"/>
+            <a:ext cx="228600" cy="506616"/>
+          </a:xfrm>
+          <a:prstGeom prst="downArrow">
+            <a:avLst/>
+          </a:prstGeom>
+        </p:spPr>
+        <p:style>
+          <a:lnRef idx="2">
+            <a:schemeClr val="accent1">
+              <a:shade val="15000"/>
+            </a:schemeClr>
+          </a:lnRef>
+          <a:fillRef idx="1">
+            <a:schemeClr val="accent1"/>
+          </a:fillRef>
+          <a:effectRef idx="0">
+            <a:schemeClr val="accent1"/>
+          </a:effectRef>
+          <a:fontRef idx="minor">
+            <a:schemeClr val="lt1"/>
+          </a:fontRef>
+        </p:style>
+        <p:txBody>
+          <a:bodyPr rtlCol="0" anchor="ctr"/>
+          <a:lstStyle/>
+          <a:p>
+            <a:pPr algn="ctr"/>
+            <a:endParaRPr lang="en-IN"/>
+          </a:p>
+        </p:txBody>
+      </p:sp>
+    </p:spTree>
+    <p:extLst>
+      <p:ext uri="{BB962C8B-B14F-4D97-AF65-F5344CB8AC3E}">
+        <p14:creationId xmlns:p14="http://schemas.microsoft.com/office/powerpoint/2010/main" val="812042168"/>
+      </p:ext>
+    </p:extLst>
+  </p:cSld>
+  <p:clrMapOvr>
+    <a:masterClrMapping/>
+  </p:clrMapOvr>
+</p:sld>
+</file>
+
+<file path=ppt/slides/slide7.xml><?xml version="1.0" encoding="utf-8"?>
 <p:sld xmlns:a="http://schemas.openxmlformats.org/drawingml/2006/main" xmlns:r="http://schemas.openxmlformats.org/officeDocument/2006/relationships" xmlns:p="http://schemas.openxmlformats.org/presentationml/2006/main">
   <p:cSld>
     <p:spTree>
